--- a/chapter11/parts/part-05-weak-supervision-intro/clip.pptx
+++ b/chapter11/parts/part-05-weak-supervision-intro/clip.pptx
@@ -4326,10 +4326,12 @@
           </a:bodyPr>
           <a:lstStyle/>
           <a:p>
-            <a:pPr>
+            <a:pPr lvl="0" marL="457200" indent="-228600">
+              <a:buFont typeface="Calibri"/>
               <a:spcAft>
                 <a:spcPts val="1000"/>
               </a:spcAft>
+              <a:buSzPct val="100000"/>
               <a:buChar char="•"/>
               <a:lnSpc>
                 <a:spcPts val="2200"/>
@@ -4346,10 +4348,12 @@
             </a:r>
           </a:p>
           <a:p>
-            <a:pPr>
+            <a:pPr lvl="0" marL="457200" indent="-228600">
+              <a:buFont typeface="Calibri"/>
               <a:spcAft>
                 <a:spcPts val="1000"/>
               </a:spcAft>
+              <a:buSzPct val="100000"/>
               <a:buChar char="•"/>
               <a:lnSpc>
                 <a:spcPts val="2200"/>
@@ -4485,10 +4489,12 @@
           </a:bodyPr>
           <a:lstStyle/>
           <a:p>
-            <a:pPr>
+            <a:pPr lvl="0" marL="457200" indent="-228600">
+              <a:buFont typeface="Calibri"/>
               <a:spcAft>
                 <a:spcPts val="1000"/>
               </a:spcAft>
+              <a:buSzPct val="100000"/>
               <a:buChar char="•"/>
               <a:lnSpc>
                 <a:spcPts val="2200"/>
@@ -4624,10 +4630,12 @@
           </a:bodyPr>
           <a:lstStyle/>
           <a:p>
-            <a:pPr>
+            <a:pPr lvl="0" marL="457200" indent="-228600">
+              <a:buFont typeface="Calibri"/>
               <a:spcAft>
                 <a:spcPts val="1000"/>
               </a:spcAft>
+              <a:buSzPct val="100000"/>
               <a:buChar char="•"/>
               <a:lnSpc>
                 <a:spcPts val="2200"/>
@@ -4644,10 +4652,12 @@
             </a:r>
           </a:p>
           <a:p>
-            <a:pPr>
+            <a:pPr lvl="0" marL="457200" indent="-228600">
+              <a:buFont typeface="Calibri"/>
               <a:spcAft>
                 <a:spcPts val="1000"/>
               </a:spcAft>
+              <a:buSzPct val="100000"/>
               <a:buChar char="•"/>
               <a:lnSpc>
                 <a:spcPts val="2200"/>
@@ -4783,10 +4793,12 @@
           </a:bodyPr>
           <a:lstStyle/>
           <a:p>
-            <a:pPr>
+            <a:pPr lvl="0" marL="457200" indent="-228600">
+              <a:buFont typeface="Calibri"/>
               <a:spcAft>
                 <a:spcPts val="1000"/>
               </a:spcAft>
+              <a:buSzPct val="100000"/>
               <a:buChar char="•"/>
               <a:lnSpc>
                 <a:spcPts val="2200"/>
@@ -4803,10 +4815,12 @@
             </a:r>
           </a:p>
           <a:p>
-            <a:pPr>
+            <a:pPr lvl="0" marL="457200" indent="-228600">
+              <a:buFont typeface="Calibri"/>
               <a:spcAft>
                 <a:spcPts val="1000"/>
               </a:spcAft>
+              <a:buSzPct val="100000"/>
               <a:buChar char="•"/>
               <a:lnSpc>
                 <a:spcPts val="2200"/>
@@ -4823,10 +4837,12 @@
             </a:r>
           </a:p>
           <a:p>
-            <a:pPr>
+            <a:pPr lvl="0" marL="457200" indent="-228600">
+              <a:buFont typeface="Calibri"/>
               <a:spcAft>
                 <a:spcPts val="1000"/>
               </a:spcAft>
+              <a:buSzPct val="100000"/>
               <a:buChar char="•"/>
               <a:lnSpc>
                 <a:spcPts val="2200"/>
@@ -4962,10 +4978,12 @@
           </a:bodyPr>
           <a:lstStyle/>
           <a:p>
-            <a:pPr>
+            <a:pPr lvl="0" marL="457200" indent="-228600">
+              <a:buFont typeface="Calibri"/>
               <a:spcAft>
                 <a:spcPts val="1000"/>
               </a:spcAft>
+              <a:buSzPct val="100000"/>
               <a:buChar char="•"/>
               <a:lnSpc>
                 <a:spcPts val="2200"/>
@@ -4982,10 +5000,12 @@
             </a:r>
           </a:p>
           <a:p>
-            <a:pPr>
+            <a:pPr lvl="0" marL="457200" indent="-228600">
+              <a:buFont typeface="Calibri"/>
               <a:spcAft>
                 <a:spcPts val="1000"/>
               </a:spcAft>
+              <a:buSzPct val="100000"/>
               <a:buChar char="•"/>
               <a:lnSpc>
                 <a:spcPts val="2200"/>
@@ -5002,10 +5022,12 @@
             </a:r>
           </a:p>
           <a:p>
-            <a:pPr>
+            <a:pPr lvl="0" marL="457200" indent="-228600">
+              <a:buFont typeface="Calibri"/>
               <a:spcAft>
                 <a:spcPts val="1000"/>
               </a:spcAft>
+              <a:buSzPct val="100000"/>
               <a:buChar char="•"/>
               <a:lnSpc>
                 <a:spcPts val="2200"/>
@@ -5141,10 +5163,12 @@
           </a:bodyPr>
           <a:lstStyle/>
           <a:p>
-            <a:pPr>
+            <a:pPr lvl="0" marL="457200" indent="-228600">
+              <a:buFont typeface="Calibri"/>
               <a:spcAft>
                 <a:spcPts val="1000"/>
               </a:spcAft>
+              <a:buSzPct val="100000"/>
               <a:buChar char="•"/>
               <a:lnSpc>
                 <a:spcPts val="2200"/>
@@ -5161,10 +5185,12 @@
             </a:r>
           </a:p>
           <a:p>
-            <a:pPr>
+            <a:pPr lvl="0" marL="457200" indent="-228600">
+              <a:buFont typeface="Calibri"/>
               <a:spcAft>
                 <a:spcPts val="1000"/>
               </a:spcAft>
+              <a:buSzPct val="100000"/>
               <a:buChar char="•"/>
               <a:lnSpc>
                 <a:spcPts val="2200"/>
@@ -5181,10 +5207,12 @@
             </a:r>
           </a:p>
           <a:p>
-            <a:pPr>
+            <a:pPr lvl="0" marL="457200" indent="-228600">
+              <a:buFont typeface="Calibri"/>
               <a:spcAft>
                 <a:spcPts val="1000"/>
               </a:spcAft>
+              <a:buSzPct val="100000"/>
               <a:buChar char="•"/>
               <a:lnSpc>
                 <a:spcPts val="2200"/>
@@ -5320,10 +5348,12 @@
           </a:bodyPr>
           <a:lstStyle/>
           <a:p>
-            <a:pPr>
+            <a:pPr lvl="0" marL="457200" indent="-228600">
+              <a:buFont typeface="Calibri"/>
               <a:spcAft>
                 <a:spcPts val="1000"/>
               </a:spcAft>
+              <a:buSzPct val="100000"/>
               <a:buChar char="•"/>
               <a:lnSpc>
                 <a:spcPts val="2200"/>
@@ -5340,10 +5370,12 @@
             </a:r>
           </a:p>
           <a:p>
-            <a:pPr>
+            <a:pPr lvl="0" marL="457200" indent="-228600">
+              <a:buFont typeface="Calibri"/>
               <a:spcAft>
                 <a:spcPts val="1000"/>
               </a:spcAft>
+              <a:buSzPct val="100000"/>
               <a:buChar char="•"/>
               <a:lnSpc>
                 <a:spcPts val="2200"/>
@@ -5479,10 +5511,12 @@
           </a:bodyPr>
           <a:lstStyle/>
           <a:p>
-            <a:pPr>
+            <a:pPr lvl="0" marL="457200" indent="-228600">
+              <a:buFont typeface="Calibri"/>
               <a:spcAft>
                 <a:spcPts val="1000"/>
               </a:spcAft>
+              <a:buSzPct val="100000"/>
               <a:buChar char="•"/>
               <a:lnSpc>
                 <a:spcPts val="2200"/>
@@ -5499,10 +5533,12 @@
             </a:r>
           </a:p>
           <a:p>
-            <a:pPr>
+            <a:pPr lvl="0" marL="457200" indent="-228600">
+              <a:buFont typeface="Calibri"/>
               <a:spcAft>
                 <a:spcPts val="1000"/>
               </a:spcAft>
+              <a:buSzPct val="100000"/>
               <a:buChar char="•"/>
               <a:lnSpc>
                 <a:spcPts val="2200"/>
@@ -5519,10 +5555,12 @@
             </a:r>
           </a:p>
           <a:p>
-            <a:pPr>
+            <a:pPr lvl="0" marL="457200" indent="-228600">
+              <a:buFont typeface="Calibri"/>
               <a:spcAft>
                 <a:spcPts val="1000"/>
               </a:spcAft>
+              <a:buSzPct val="100000"/>
               <a:buChar char="•"/>
               <a:lnSpc>
                 <a:spcPts val="2200"/>
@@ -5658,10 +5696,12 @@
           </a:bodyPr>
           <a:lstStyle/>
           <a:p>
-            <a:pPr>
+            <a:pPr lvl="0" marL="457200" indent="-228600">
+              <a:buFont typeface="Calibri"/>
               <a:spcAft>
                 <a:spcPts val="1000"/>
               </a:spcAft>
+              <a:buSzPct val="100000"/>
               <a:buChar char="•"/>
               <a:lnSpc>
                 <a:spcPts val="2200"/>
@@ -5678,10 +5718,12 @@
             </a:r>
           </a:p>
           <a:p>
-            <a:pPr>
+            <a:pPr lvl="0" marL="457200" indent="-228600">
+              <a:buFont typeface="Calibri"/>
               <a:spcAft>
                 <a:spcPts val="1000"/>
               </a:spcAft>
+              <a:buSzPct val="100000"/>
               <a:buChar char="•"/>
               <a:lnSpc>
                 <a:spcPts val="2200"/>
@@ -5698,10 +5740,12 @@
             </a:r>
           </a:p>
           <a:p>
-            <a:pPr>
+            <a:pPr lvl="0" marL="457200" indent="-228600">
+              <a:buFont typeface="Calibri"/>
               <a:spcAft>
                 <a:spcPts val="1000"/>
               </a:spcAft>
+              <a:buSzPct val="100000"/>
               <a:buChar char="•"/>
               <a:lnSpc>
                 <a:spcPts val="2200"/>
